--- a/Foundation_F4/Workshop/F4-W04_Apply_Workshop_L07-L08_The_Science_Museum_Trip.pptx
+++ b/Foundation_F4/Workshop/F4-W04_Apply_Workshop_L07-L08_The_Science_Museum_Trip.pptx
@@ -7435,7 +7435,7 @@
                 <a:latin typeface="Calibri" pitchFamily="34" charset="0"/>
                 <a:cs typeface="Amiri" pitchFamily="2" charset="-78"/>
               </a:rPr>
-              <a:t>Odd numbers come from F4-L07, even numbers from F4-L08. Core: a full sentence from the starter. Develop: add the “more” part. Stretch: link two answers with </a:t>
+              <a:t>Odd numbers come from F4-L07, even numbers from F4-L08. Core: a full sentence from the starter. Develop: add the “more” part. Stretch: link two answers with ‏</a:t>
             </a:r>
             <a:pPr algn="l" indent="0" marL="0">
               <a:buNone/>
@@ -7462,7 +7462,7 @@
                 <a:latin typeface="Calibri" pitchFamily="34" charset="0"/>
                 <a:cs typeface="Amiri" pitchFamily="2" charset="-78"/>
               </a:rPr>
-              <a:t>, </a:t>
+              <a:t>‏, ‏</a:t>
             </a:r>
             <a:pPr algn="l" indent="0" marL="0">
               <a:buNone/>
@@ -7489,7 +7489,7 @@
                 <a:latin typeface="Calibri" pitchFamily="34" charset="0"/>
                 <a:cs typeface="Amiri" pitchFamily="2" charset="-78"/>
               </a:rPr>
-              <a:t> or </a:t>
+              <a:t>‏ or ‏</a:t>
             </a:r>
             <a:pPr algn="l" indent="0" marL="0">
               <a:buNone/>
@@ -7516,7 +7516,7 @@
                 <a:latin typeface="Calibri" pitchFamily="34" charset="0"/>
                 <a:cs typeface="Amiri" pitchFamily="2" charset="-78"/>
               </a:rPr>
-              <a:t>. Swap after each question.</a:t>
+              <a:t>‏. Swap after each question.</a:t>
             </a:r>
             <a:endParaRPr lang="en-US" sz="1100" dirty="0"/>
           </a:p>
@@ -10839,7 +10839,7 @@
                 <a:latin typeface="Calibri" pitchFamily="34" charset="0"/>
                 <a:cs typeface="Amiri" pitchFamily="2" charset="-78"/>
               </a:rPr>
-              <a:t>Use three connectors: </a:t>
+              <a:t>Use three connectors: ‏</a:t>
             </a:r>
             <a:pPr algn="l" indent="0" marL="0">
               <a:buNone/>
@@ -10947,7 +10947,7 @@
                 <a:latin typeface="Calibri" pitchFamily="34" charset="0"/>
                 <a:cs typeface="Amiri" pitchFamily="2" charset="-78"/>
               </a:rPr>
-              <a:t>.</a:t>
+              <a:t>‏.</a:t>
             </a:r>
             <a:endParaRPr lang="en-US" sz="1150" dirty="0"/>
           </a:p>
@@ -11084,7 +11084,7 @@
                 <a:latin typeface="Calibri" pitchFamily="34" charset="0"/>
                 <a:cs typeface="Amiri" pitchFamily="2" charset="-78"/>
               </a:rPr>
-              <a:t>Add facts from the notice (… </a:t>
+              <a:t>Add facts from the notice (… ‏</a:t>
             </a:r>
             <a:pPr algn="l" indent="0" marL="0">
               <a:buNone/>
@@ -11111,7 +11111,7 @@
                 <a:latin typeface="Calibri" pitchFamily="34" charset="0"/>
                 <a:cs typeface="Amiri" pitchFamily="2" charset="-78"/>
               </a:rPr>
-              <a:t> …) and </a:t>
+              <a:t> …‏) and ‏</a:t>
             </a:r>
             <a:pPr algn="l" indent="0" marL="0">
               <a:buNone/>
@@ -11138,7 +11138,7 @@
                 <a:latin typeface="Calibri" pitchFamily="34" charset="0"/>
                 <a:cs typeface="Amiri" pitchFamily="2" charset="-78"/>
               </a:rPr>
-              <a:t> …</a:t>
+              <a:t> …‏</a:t>
             </a:r>
             <a:endParaRPr lang="en-US" sz="1150" dirty="0"/>
           </a:p>
@@ -17567,7 +17567,7 @@
                 <a:latin typeface="Calibri" pitchFamily="34" charset="0"/>
                 <a:cs typeface="Amiri" pitchFamily="2" charset="-78"/>
               </a:rPr>
-              <a:t>Use different connectors: </a:t>
+              <a:t>Use different connectors: ‏</a:t>
             </a:r>
             <a:pPr algn="l" indent="0" marL="0">
               <a:buNone/>
@@ -17648,7 +17648,7 @@
                 <a:latin typeface="Calibri" pitchFamily="34" charset="0"/>
                 <a:cs typeface="Amiri" pitchFamily="2" charset="-78"/>
               </a:rPr>
-              <a:t>.</a:t>
+              <a:t>‏.</a:t>
             </a:r>
             <a:endParaRPr lang="en-US" sz="1150" dirty="0"/>
           </a:p>
@@ -17852,6 +17852,19 @@
               <a:buNone/>
             </a:pPr>
             <a:r>
+              <a:rPr lang="en-US" sz="1150" b="1" dirty="0">
+                <a:solidFill>
+                  <a:srgbClr val="1B3B6F"/>
+                </a:solidFill>
+                <a:latin typeface="Calibri" pitchFamily="34" charset="0"/>
+                <a:cs typeface="Amiri" pitchFamily="2" charset="-78"/>
+              </a:rPr>
+              <a:t>‏</a:t>
+            </a:r>
+            <a:pPr algn="l" indent="0" marL="0">
+              <a:buNone/>
+            </a:pPr>
+            <a:r>
               <a:rPr lang="ar-SA" altLang="en-US" sz="1500" b="1" dirty="0">
                 <a:solidFill>
                   <a:srgbClr val="1B3B6F"/>
@@ -17873,7 +17886,7 @@
                 <a:latin typeface="Calibri" pitchFamily="34" charset="0"/>
                 <a:cs typeface="Amiri" pitchFamily="2" charset="-78"/>
               </a:rPr>
-              <a:t> → a time or a day, not a place.</a:t>
+              <a:t>‏ → a time or a day, not a place.</a:t>
             </a:r>
             <a:endParaRPr lang="en-US" sz="1150" dirty="0"/>
           </a:p>
@@ -18084,7 +18097,7 @@
                 <a:latin typeface="Calibri" pitchFamily="34" charset="0"/>
                 <a:cs typeface="Amiri" pitchFamily="2" charset="-78"/>
               </a:rPr>
-              <a:t>“I” → </a:t>
+              <a:t>“I” → ‏</a:t>
             </a:r>
             <a:pPr algn="l" indent="0" marL="0">
               <a:buNone/>
@@ -18111,7 +18124,7 @@
                 <a:latin typeface="Calibri" pitchFamily="34" charset="0"/>
                 <a:cs typeface="Amiri" pitchFamily="2" charset="-78"/>
               </a:rPr>
-              <a:t>.</a:t>
+              <a:t>‏.</a:t>
             </a:r>
             <a:endParaRPr lang="en-US" sz="1150" dirty="0"/>
           </a:p>
@@ -20311,7 +20324,7 @@
                 <a:latin typeface="Calibri" pitchFamily="34" charset="0"/>
                 <a:cs typeface="Amiri" pitchFamily="2" charset="-78"/>
               </a:rPr>
-              <a:t>☐  At least one </a:t>
+              <a:t>☐  At least one ‏</a:t>
             </a:r>
             <a:pPr algn="l" indent="0" marL="0">
               <a:buNone/>
@@ -20338,7 +20351,7 @@
                 <a:latin typeface="Calibri" pitchFamily="34" charset="0"/>
                 <a:cs typeface="Amiri" pitchFamily="2" charset="-78"/>
               </a:rPr>
-              <a:t> and one </a:t>
+              <a:t>‏ and one ‏</a:t>
             </a:r>
             <a:pPr algn="l" indent="0" marL="0">
               <a:buNone/>
@@ -20365,7 +20378,7 @@
                 <a:latin typeface="Calibri" pitchFamily="34" charset="0"/>
                 <a:cs typeface="Amiri" pitchFamily="2" charset="-78"/>
               </a:rPr>
-              <a:t> (Develop).</a:t>
+              <a:t>‏ (Develop).</a:t>
             </a:r>
             <a:endParaRPr lang="en-US" sz="1200" dirty="0"/>
           </a:p>
@@ -23913,7 +23926,7 @@
                 <a:latin typeface="Calibri" pitchFamily="34" charset="0"/>
                 <a:cs typeface="Amiri" pitchFamily="2" charset="-78"/>
               </a:rPr>
-              <a:t>use notice language (</a:t>
+              <a:t>use notice language (‏</a:t>
             </a:r>
             <a:pPr algn="l" indent="0" marL="0">
               <a:buNone/>
@@ -23967,7 +23980,7 @@
                 <a:latin typeface="Calibri" pitchFamily="34" charset="0"/>
                 <a:cs typeface="Amiri" pitchFamily="2" charset="-78"/>
               </a:rPr>
-              <a:t> …)?</a:t>
+              <a:t> …‏)?</a:t>
             </a:r>
             <a:endParaRPr lang="en-US" sz="1100" dirty="0"/>
           </a:p>
@@ -24126,7 +24139,7 @@
                 <a:latin typeface="Calibri" pitchFamily="34" charset="0"/>
                 <a:cs typeface="Amiri" pitchFamily="2" charset="-78"/>
               </a:rPr>
-              <a:t>use linking words (</a:t>
+              <a:t>use linking words (‏</a:t>
             </a:r>
             <a:pPr algn="l" indent="0" marL="0">
               <a:buNone/>
@@ -24234,7 +24247,7 @@
                 <a:latin typeface="Calibri" pitchFamily="34" charset="0"/>
                 <a:cs typeface="Amiri" pitchFamily="2" charset="-78"/>
               </a:rPr>
-              <a:t>)?</a:t>
+              <a:t>‏)?</a:t>
             </a:r>
             <a:endParaRPr lang="en-US" sz="1100" dirty="0"/>
           </a:p>
@@ -28180,7 +28193,7 @@
                 <a:latin typeface="Calibri" pitchFamily="34" charset="0"/>
                 <a:cs typeface="Amiri" pitchFamily="2" charset="-78"/>
               </a:rPr>
-              <a:t>I added reasons (</a:t>
+              <a:t>I added reasons (‏</a:t>
             </a:r>
             <a:pPr algn="l" indent="0" marL="0">
               <a:buNone/>
@@ -28207,7 +28220,7 @@
                 <a:latin typeface="Calibri" pitchFamily="34" charset="0"/>
                 <a:cs typeface="Amiri" pitchFamily="2" charset="-78"/>
               </a:rPr>
-              <a:t>) and extra details without frames.</a:t>
+              <a:t>‏) and extra details without frames.</a:t>
             </a:r>
             <a:endParaRPr lang="en-US" sz="1300" dirty="0"/>
           </a:p>
@@ -32335,7 +32348,7 @@
                 <a:latin typeface="Calibri" pitchFamily="34" charset="0"/>
                 <a:cs typeface="Amiri" pitchFamily="2" charset="-78"/>
               </a:rPr>
-              <a:t>☐  Add a reason (</a:t>
+              <a:t>☐  Add a reason (‏</a:t>
             </a:r>
             <a:pPr algn="l" indent="0" marL="0">
               <a:buNone/>
@@ -32362,7 +32375,7 @@
                 <a:latin typeface="Calibri" pitchFamily="34" charset="0"/>
                 <a:cs typeface="Amiri" pitchFamily="2" charset="-78"/>
               </a:rPr>
-              <a:t>) and an extra detail to every point.</a:t>
+              <a:t>‏) and an extra detail to every point.</a:t>
             </a:r>
             <a:endParaRPr lang="en-US" sz="1300" dirty="0"/>
           </a:p>
@@ -33883,7 +33896,7 @@
                 <a:latin typeface="Calibri" pitchFamily="34" charset="0"/>
                 <a:cs typeface="Amiri" pitchFamily="2" charset="-78"/>
               </a:rPr>
-              <a:t>Join a word from each lesson in one sentence with </a:t>
+              <a:t>Join a word from each lesson in one sentence with ‏</a:t>
             </a:r>
             <a:pPr algn="l" indent="0" marL="0">
               <a:buNone/>
@@ -33910,7 +33923,7 @@
                 <a:latin typeface="Calibri" pitchFamily="34" charset="0"/>
                 <a:cs typeface="Amiri" pitchFamily="2" charset="-78"/>
               </a:rPr>
-              <a:t> or </a:t>
+              <a:t>‏ or ‏</a:t>
             </a:r>
             <a:pPr algn="l" indent="0" marL="0">
               <a:buNone/>
@@ -33937,7 +33950,7 @@
                 <a:latin typeface="Calibri" pitchFamily="34" charset="0"/>
                 <a:cs typeface="Amiri" pitchFamily="2" charset="-78"/>
               </a:rPr>
-              <a:t>.</a:t>
+              <a:t>‏.</a:t>
             </a:r>
             <a:endParaRPr lang="en-US" sz="1150" dirty="0"/>
           </a:p>
